--- a/outsystems/niveau-1/deel-03/slidedeck.pptx
+++ b/outsystems/niveau-1/deel-03/slidedeck.pptx
@@ -3212,8 +3212,8 @@
         </p:nvSpPr>
         <p:spPr>
           <a:xfrm>
-            <a:off x="640080" y="548640"/>
-            <a:ext cx="10881360" cy="914400"/>
+            <a:off x="640080" y="457200"/>
+            <a:ext cx="10881360" cy="822960"/>
           </a:xfrm>
           <a:prstGeom prst="rect">
             <a:avLst/>
@@ -3452,8 +3452,8 @@
         </p:nvSpPr>
         <p:spPr>
           <a:xfrm>
-            <a:off x="640080" y="548640"/>
-            <a:ext cx="10881360" cy="914400"/>
+            <a:off x="640080" y="457200"/>
+            <a:ext cx="10881360" cy="822960"/>
           </a:xfrm>
           <a:prstGeom prst="rect">
             <a:avLst/>
@@ -3645,8 +3645,8 @@
         </p:nvSpPr>
         <p:spPr>
           <a:xfrm>
-            <a:off x="640080" y="548640"/>
-            <a:ext cx="10881360" cy="914400"/>
+            <a:off x="640080" y="457200"/>
+            <a:ext cx="10881360" cy="822960"/>
           </a:xfrm>
           <a:prstGeom prst="rect">
             <a:avLst/>
@@ -3680,8 +3680,8 @@
         </p:nvSpPr>
         <p:spPr>
           <a:xfrm>
-            <a:off x="822960" y="1737360"/>
-            <a:ext cx="10515600" cy="4114800"/>
+            <a:off x="640080" y="1463040"/>
+            <a:ext cx="5029200" cy="4937760"/>
           </a:xfrm>
           <a:prstGeom prst="rect">
             <a:avLst/>
@@ -3696,7 +3696,7 @@
           <a:p>
             <a:pPr algn="l"/>
             <a:r>
-              <a:rPr sz="2000" b="0">
+              <a:rPr sz="1700" b="0">
                 <a:solidFill>
                   <a:srgbClr val="14213D"/>
                 </a:solidFill>
@@ -3708,7 +3708,7 @@
           <a:p>
             <a:pPr algn="l"/>
             <a:r>
-              <a:rPr sz="2000" b="0">
+              <a:rPr sz="1700" b="0">
                 <a:solidFill>
                   <a:srgbClr val="14213D"/>
                 </a:solidFill>
@@ -3720,7 +3720,7 @@
           <a:p>
             <a:pPr algn="l"/>
             <a:r>
-              <a:rPr sz="2000" b="0">
+              <a:rPr sz="1700" b="0">
                 <a:solidFill>
                   <a:srgbClr val="14213D"/>
                 </a:solidFill>
@@ -3732,7 +3732,7 @@
           <a:p>
             <a:pPr algn="l"/>
             <a:r>
-              <a:rPr sz="2000" b="0">
+              <a:rPr sz="1700" b="0">
                 <a:solidFill>
                   <a:srgbClr val="14213D"/>
                 </a:solidFill>
@@ -3743,41 +3743,30 @@
           </a:p>
         </p:txBody>
       </p:sp>
-      <p:sp>
-        <p:nvSpPr>
-          <p:cNvPr id="4" name="TextBox 3"/>
-          <p:cNvSpPr txBox="1"/>
+      <p:pic>
+        <p:nvPicPr>
+          <p:cNvPr id="4" name="Picture 3" descr="figuur-3-1.png"/>
+          <p:cNvPicPr>
+            <a:picLocks noChangeAspect="1"/>
+          </p:cNvPicPr>
           <p:nvPr/>
-        </p:nvSpPr>
+        </p:nvPicPr>
+        <p:blipFill>
+          <a:blip r:embed="rId2"/>
+          <a:stretch>
+            <a:fillRect/>
+          </a:stretch>
+        </p:blipFill>
         <p:spPr>
           <a:xfrm>
-            <a:off x="822960" y="5943600"/>
-            <a:ext cx="10515600" cy="731520"/>
+            <a:off x="5852160" y="2519825"/>
+            <a:ext cx="5669280" cy="2915629"/>
           </a:xfrm>
           <a:prstGeom prst="rect">
             <a:avLst/>
           </a:prstGeom>
-          <a:noFill/>
         </p:spPr>
-        <p:txBody>
-          <a:bodyPr wrap="square">
-            <a:spAutoFit/>
-          </a:bodyPr>
-          <a:lstStyle/>
-          <a:p>
-            <a:pPr algn="l"/>
-            <a:r>
-              <a:rPr sz="1300" b="0">
-                <a:solidFill>
-                  <a:srgbClr val="999999"/>
-                </a:solidFill>
-                <a:latin typeface="DM Sans"/>
-              </a:rPr>
-              <a:t>[FIGUUR 3-1: Entity-editor met Melding-attributen]</a:t>
-            </a:r>
-          </a:p>
-        </p:txBody>
-      </p:sp>
+      </p:pic>
     </p:spTree>
   </p:cSld>
   <p:clrMapOvr>
@@ -3873,8 +3862,8 @@
         </p:nvSpPr>
         <p:spPr>
           <a:xfrm>
-            <a:off x="640080" y="548640"/>
-            <a:ext cx="10881360" cy="914400"/>
+            <a:off x="640080" y="457200"/>
+            <a:ext cx="10881360" cy="822960"/>
           </a:xfrm>
           <a:prstGeom prst="rect">
             <a:avLst/>
@@ -4174,8 +4163,8 @@
         </p:nvSpPr>
         <p:spPr>
           <a:xfrm>
-            <a:off x="640080" y="548640"/>
-            <a:ext cx="10881360" cy="914400"/>
+            <a:off x="640080" y="457200"/>
+            <a:ext cx="10881360" cy="822960"/>
           </a:xfrm>
           <a:prstGeom prst="rect">
             <a:avLst/>
@@ -4209,8 +4198,8 @@
         </p:nvSpPr>
         <p:spPr>
           <a:xfrm>
-            <a:off x="822960" y="1737360"/>
-            <a:ext cx="10515600" cy="4114800"/>
+            <a:off x="640080" y="1463040"/>
+            <a:ext cx="5029200" cy="4937760"/>
           </a:xfrm>
           <a:prstGeom prst="rect">
             <a:avLst/>
@@ -4225,7 +4214,7 @@
           <a:p>
             <a:pPr algn="l"/>
             <a:r>
-              <a:rPr sz="2000" b="0">
+              <a:rPr sz="1700" b="0">
                 <a:solidFill>
                   <a:srgbClr val="14213D"/>
                 </a:solidFill>
@@ -4237,7 +4226,7 @@
           <a:p>
             <a:pPr algn="l"/>
             <a:r>
-              <a:rPr sz="2000" b="0">
+              <a:rPr sz="1700" b="0">
                 <a:solidFill>
                   <a:srgbClr val="14213D"/>
                 </a:solidFill>
@@ -4249,7 +4238,7 @@
           <a:p>
             <a:pPr algn="l"/>
             <a:r>
-              <a:rPr sz="2000" b="0">
+              <a:rPr sz="1700" b="0">
                 <a:solidFill>
                   <a:srgbClr val="14213D"/>
                 </a:solidFill>
@@ -4260,41 +4249,30 @@
           </a:p>
         </p:txBody>
       </p:sp>
-      <p:sp>
-        <p:nvSpPr>
-          <p:cNvPr id="4" name="TextBox 3"/>
-          <p:cNvSpPr txBox="1"/>
+      <p:pic>
+        <p:nvPicPr>
+          <p:cNvPr id="4" name="Picture 3" descr="figuur-3-2.png"/>
+          <p:cNvPicPr>
+            <a:picLocks noChangeAspect="1"/>
+          </p:cNvPicPr>
           <p:nvPr/>
-        </p:nvSpPr>
+        </p:nvPicPr>
+        <p:blipFill>
+          <a:blip r:embed="rId2"/>
+          <a:stretch>
+            <a:fillRect/>
+          </a:stretch>
+        </p:blipFill>
         <p:spPr>
           <a:xfrm>
-            <a:off x="822960" y="5943600"/>
-            <a:ext cx="10515600" cy="731520"/>
+            <a:off x="5852160" y="2519825"/>
+            <a:ext cx="5669280" cy="2915629"/>
           </a:xfrm>
           <a:prstGeom prst="rect">
             <a:avLst/>
           </a:prstGeom>
-          <a:noFill/>
         </p:spPr>
-        <p:txBody>
-          <a:bodyPr wrap="square">
-            <a:spAutoFit/>
-          </a:bodyPr>
-          <a:lstStyle/>
-          <a:p>
-            <a:pPr algn="l"/>
-            <a:r>
-              <a:rPr sz="1300" b="0">
-                <a:solidFill>
-                  <a:srgbClr val="999999"/>
-                </a:solidFill>
-                <a:latin typeface="DM Sans"/>
-              </a:rPr>
-              <a:t>[FIGUUR 3-2: Relatiediagram Melding-Werkgever-MeldingStatus-Document]</a:t>
-            </a:r>
-          </a:p>
-        </p:txBody>
-      </p:sp>
+      </p:pic>
     </p:spTree>
   </p:cSld>
   <p:clrMapOvr>
